--- a/docs/slides/mec-cast-architecture.pptx
+++ b/docs/slides/mec-cast-architecture.pptx
@@ -6179,7 +6179,7 @@
                 <a:ea typeface="Cambria" pitchFamily="34" charset="-122"/>
                 <a:cs typeface="Cambria" pitchFamily="34" charset="-120"/>
               </a:rPr>
-              <a:t>Logging service — PostgreSQL + FastAPI</a:t>
+              <a:t>Edge services — logging and admin</a:t>
             </a:r>
             <a:endParaRPr lang="en-US" sz="3200" dirty="0"/>
           </a:p>
@@ -6218,7 +6218,7 @@
                 <a:ea typeface="Calibri" pitchFamily="34" charset="-122"/>
                 <a:cs typeface="Calibri" pitchFamily="34" charset="-120"/>
               </a:rPr>
-              <a:t>mec-cast-logging-service: where aggregated results land. FastAPI + asyncpg over PostgreSQL, consumed as a git submodule at services/logging.</a:t>
+              <a:t>Two first-party services on the edge host. Logging is where aggregated results land; admin is where runs are started and stopped.</a:t>
             </a:r>
             <a:endParaRPr lang="en-US" sz="1300" dirty="0"/>
           </a:p>
@@ -6712,7 +6712,7 @@
                 <a:ea typeface="Calibri" pitchFamily="34" charset="-122"/>
                 <a:cs typeface="Calibri" pitchFamily="34" charset="-120"/>
               </a:rPr>
-              <a:t>Schema is a contract</a:t>
+              <a:t>Admin — run control plane  (:8099)</a:t>
             </a:r>
             <a:endParaRPr lang="en-US" sz="1300" dirty="0"/>
           </a:p>
@@ -6754,7 +6754,7 @@
                 <a:ea typeface="Calibri" pitchFamily="34" charset="-122"/>
                 <a:cs typeface="Calibri" pitchFamily="34" charset="-120"/>
               </a:rPr>
-              <a:t>LogEntryCreate is extra="forbid": any unexpected top-level</a:t>
+              <a:t>Nodes subscribe over WebSocket on startup and retry every</a:t>
             </a:r>
             <a:endParaRPr lang="en-US" sz="1100" dirty="0"/>
           </a:p>
@@ -6774,7 +6774,7 @@
                 <a:ea typeface="Calibri" pitchFamily="34" charset="-122"/>
                 <a:cs typeface="Calibri" pitchFamily="34" charset="-120"/>
               </a:rPr>
-              <a:t>field is a runtime 422. Everything mec-cast-specific goes</a:t>
+              <a:t>30 s. Runs are created, started and stopped from a page;</a:t>
             </a:r>
             <a:endParaRPr lang="en-US" sz="1100" dirty="0"/>
           </a:p>
@@ -6794,7 +6794,7 @@
                 <a:ea typeface="Calibri" pitchFamily="34" charset="-122"/>
                 <a:cs typeface="Calibri" pitchFamily="34" charset="-120"/>
               </a:rPr>
-              <a:t>inside context. Migrations apply automatically at startup.</a:t>
+              <a:t>state machine, keep-alive, and workflow diagnostics.</a:t>
             </a:r>
             <a:endParaRPr lang="en-US" sz="1100" dirty="0"/>
           </a:p>
@@ -6858,7 +6858,7 @@
                 <a:ea typeface="Calibri" pitchFamily="34" charset="-122"/>
                 <a:cs typeface="Calibri" pitchFamily="34" charset="-120"/>
               </a:rPr>
-              <a:t>Operational posture</a:t>
+              <a:t>Operational posture — both</a:t>
             </a:r>
             <a:endParaRPr lang="en-US" sz="1300" dirty="0"/>
           </a:p>
@@ -6900,7 +6900,7 @@
                 <a:ea typeface="Calibri" pitchFamily="34" charset="-122"/>
                 <a:cs typeface="Calibri" pitchFamily="34" charset="-120"/>
               </a:rPr>
-              <a:t>No authentication and no rate limiting by design — bind it</a:t>
+              <a:t>No authentication on either — bind them to the management</a:t>
             </a:r>
             <a:endParaRPr lang="en-US" sz="1100" dirty="0"/>
           </a:p>
@@ -6920,7 +6920,7 @@
                 <a:ea typeface="Calibri" pitchFamily="34" charset="-122"/>
                 <a:cs typeface="Calibri" pitchFamily="34" charset="-120"/>
               </a:rPr>
-              <a:t>to the management LAN only. Bulk deletion is a CLI command,</a:t>
+              <a:t>LAN only. Admin can start and stop experiments, so its</a:t>
             </a:r>
             <a:endParaRPr lang="en-US" sz="1100" dirty="0"/>
           </a:p>
@@ -6940,7 +6940,7 @@
                 <a:ea typeface="Calibri" pitchFamily="34" charset="-122"/>
                 <a:cs typeface="Calibri" pitchFamily="34" charset="-120"/>
               </a:rPr>
-              <a:t>not an endpoint: mec-cast-logs purge --days 30</a:t>
+              <a:t>blast radius is wider than the log store's.</a:t>
             </a:r>
             <a:endParaRPr lang="en-US" sz="1100" dirty="0"/>
           </a:p>
@@ -6982,7 +6982,7 @@
                 <a:ea typeface="Calibri" pitchFamily="34" charset="-122"/>
                 <a:cs typeface="Calibri" pitchFamily="34" charset="-120"/>
               </a:rPr>
-              <a:t>Per-frame samples do NOT go here — that firehose goes to CSV under runs/&lt;RUN_ID&gt;/. This service holds 2-second aggregated snapshots plus lifecycle and error events, which is what makes it queryable rather than merely large.</a:t>
+              <a:t>Per-frame samples do NOT go here — that firehose goes to CSV under runs/&lt;RUN_ID&gt;/. Logging holds 2-second aggregated snapshots; admin holds run manifests as files, no database, so the page still works when PostgreSQL is down.</a:t>
             </a:r>
             <a:endParaRPr lang="en-US" sz="1100" dirty="0"/>
           </a:p>
@@ -9782,7 +9782,27 @@
                 <a:ea typeface="Calibri" pitchFamily="34" charset="-122"/>
                 <a:cs typeface="Calibri" pitchFamily="34" charset="-120"/>
               </a:rPr>
-              <a:t>built for large payloads over lossy links; TCP / QUIC</a:t>
+              <a:t>large payloads over lossy links; here udp/7447?rel=1 —</a:t>
+            </a:r>
+            <a:endParaRPr lang="en-US" sz="1050" dirty="0"/>
+          </a:p>
+          <a:p>
+            <a:pPr indent="0" marL="0">
+              <a:lnSpc>
+                <a:spcPct val="108000"/>
+              </a:lnSpc>
+              <a:buNone/>
+            </a:pPr>
+            <a:r>
+              <a:rPr lang="en-US" sz="1050" dirty="0">
+                <a:solidFill>
+                  <a:srgbClr val="444C52"/>
+                </a:solidFill>
+                <a:latin typeface="Calibri" pitchFamily="34" charset="0"/>
+                <a:ea typeface="Calibri" pitchFamily="34" charset="-122"/>
+                <a:cs typeface="Calibri" pitchFamily="34" charset="-120"/>
+              </a:rPr>
+              <a:t>retransmit, no congestion control, no TLS</a:t>
             </a:r>
             <a:endParaRPr lang="en-US" sz="1050" dirty="0"/>
           </a:p>

--- a/docs/slides/mec-cast-architecture.pptx
+++ b/docs/slides/mec-cast-architecture.pptx
@@ -7053,7 +7053,7 @@
                 <a:ea typeface="Cambria" pitchFamily="34" charset="-122"/>
                 <a:cs typeface="Cambria" pitchFamily="34" charset="-120"/>
               </a:rPr>
-              <a:t>ROS2 client — mec_cast_lidar_client</a:t>
+              <a:t>ROS2 on the UE — client and renderer</a:t>
             </a:r>
             <a:endParaRPr lang="en-US" sz="3200" dirty="0"/>
           </a:p>
@@ -7092,7 +7092,7 @@
                 <a:ea typeface="Calibri" pitchFamily="34" charset="-122"/>
                 <a:cs typeface="Calibri" pitchFamily="34" charset="-120"/>
               </a:rPr>
-              <a:t>Runs on the UE. Vanilla ROS2 application code; only the middleware underneath is unusual.</a:t>
+              <a:t>Two nodes on the robot. Vanilla ROS2 application code; only the middleware underneath is unusual.</a:t>
             </a:r>
             <a:endParaRPr lang="en-US" sz="1300" dirty="0"/>
           </a:p>
@@ -7107,7 +7107,7 @@
         <p:spPr>
           <a:xfrm>
             <a:off x="502920" y="1600200"/>
-            <a:ext cx="3429000" cy="1143000"/>
+            <a:ext cx="2590038" cy="1143000"/>
           </a:xfrm>
           <a:prstGeom prst="rect">
             <a:avLst/>
@@ -7132,7 +7132,7 @@
         <p:spPr>
           <a:xfrm>
             <a:off x="612648" y="1691640"/>
-            <a:ext cx="3209544" cy="274320"/>
+            <a:ext cx="2370582" cy="274320"/>
           </a:xfrm>
           <a:prstGeom prst="rect">
             <a:avLst/>
@@ -7171,7 +7171,7 @@
         <p:spPr>
           <a:xfrm>
             <a:off x="612648" y="1984248"/>
-            <a:ext cx="3209544" cy="667512"/>
+            <a:ext cx="2370582" cy="667512"/>
           </a:xfrm>
           <a:prstGeom prst="rect">
             <a:avLst/>
@@ -7232,8 +7232,8 @@
         </p:nvSpPr>
         <p:spPr>
           <a:xfrm>
-            <a:off x="4389120" y="1600200"/>
-            <a:ext cx="3429000" cy="1143000"/>
+            <a:off x="3367278" y="1600200"/>
+            <a:ext cx="2590038" cy="1143000"/>
           </a:xfrm>
           <a:prstGeom prst="rect">
             <a:avLst/>
@@ -7257,8 +7257,8 @@
         </p:nvSpPr>
         <p:spPr>
           <a:xfrm>
-            <a:off x="4498848" y="1691640"/>
-            <a:ext cx="3209544" cy="274320"/>
+            <a:off x="3477006" y="1691640"/>
+            <a:ext cx="2370582" cy="274320"/>
           </a:xfrm>
           <a:prstGeom prst="rect">
             <a:avLst/>
@@ -7296,8 +7296,8 @@
         </p:nvSpPr>
         <p:spPr>
           <a:xfrm>
-            <a:off x="4498848" y="1984248"/>
-            <a:ext cx="3209544" cy="667512"/>
+            <a:off x="3477006" y="1984248"/>
+            <a:ext cx="2370582" cy="667512"/>
           </a:xfrm>
           <a:prstGeom prst="rect">
             <a:avLst/>
@@ -7358,8 +7358,8 @@
         </p:nvSpPr>
         <p:spPr>
           <a:xfrm>
-            <a:off x="8275320" y="1600200"/>
-            <a:ext cx="3410712" cy="1143000"/>
+            <a:off x="6231636" y="1600200"/>
+            <a:ext cx="2590038" cy="1143000"/>
           </a:xfrm>
           <a:prstGeom prst="rect">
             <a:avLst/>
@@ -7383,8 +7383,8 @@
         </p:nvSpPr>
         <p:spPr>
           <a:xfrm>
-            <a:off x="8385048" y="1691640"/>
-            <a:ext cx="3191256" cy="274320"/>
+            <a:off x="6341364" y="1691640"/>
+            <a:ext cx="2370582" cy="274320"/>
           </a:xfrm>
           <a:prstGeom prst="rect">
             <a:avLst/>
@@ -7422,8 +7422,8 @@
         </p:nvSpPr>
         <p:spPr>
           <a:xfrm>
-            <a:off x="8385048" y="1984248"/>
-            <a:ext cx="3191256" cy="667512"/>
+            <a:off x="6341364" y="1984248"/>
+            <a:ext cx="2370582" cy="667512"/>
           </a:xfrm>
           <a:prstGeom prst="rect">
             <a:avLst/>
@@ -7484,56 +7484,8 @@
         </p:nvSpPr>
         <p:spPr>
           <a:xfrm>
-            <a:off x="3986784" y="2171700"/>
-            <a:ext cx="347472" cy="0"/>
-          </a:xfrm>
-          <a:prstGeom prst="line">
-            <a:avLst/>
-          </a:prstGeom>
-          <a:noFill/>
-          <a:ln w="15875">
-            <a:solidFill>
-              <a:srgbClr val="444C52"/>
-            </a:solidFill>
-            <a:prstDash val="solid"/>
-            <a:tailEnd type="triangle"/>
-          </a:ln>
-        </p:spPr>
-      </p:sp>
-      <p:sp>
-        <p:nvSpPr>
-          <p:cNvPr id="14" name="Shape 12"/>
-          <p:cNvSpPr/>
-          <p:nvPr/>
-        </p:nvSpPr>
-        <p:spPr>
-          <a:xfrm>
-            <a:off x="7872984" y="2171700"/>
-            <a:ext cx="347472" cy="0"/>
-          </a:xfrm>
-          <a:prstGeom prst="line">
-            <a:avLst/>
-          </a:prstGeom>
-          <a:noFill/>
-          <a:ln w="15875">
-            <a:solidFill>
-              <a:srgbClr val="444C52"/>
-            </a:solidFill>
-            <a:prstDash val="solid"/>
-            <a:tailEnd type="triangle"/>
-          </a:ln>
-        </p:spPr>
-      </p:sp>
-      <p:sp>
-        <p:nvSpPr>
-          <p:cNvPr id="15" name="Shape 13"/>
-          <p:cNvSpPr/>
-          <p:nvPr/>
-        </p:nvSpPr>
-        <p:spPr>
-          <a:xfrm>
-            <a:off x="502920" y="2880360"/>
-            <a:ext cx="5394960" cy="1783080"/>
+            <a:off x="9095994" y="1600200"/>
+            <a:ext cx="2590038" cy="1143000"/>
           </a:xfrm>
           <a:prstGeom prst="rect">
             <a:avLst/>
@@ -7551,7 +7503,205 @@
       </p:sp>
       <p:sp>
         <p:nvSpPr>
-          <p:cNvPr id="16" name="Text 14"/>
+          <p:cNvPr id="14" name="Text 12"/>
+          <p:cNvSpPr/>
+          <p:nvPr/>
+        </p:nvSpPr>
+        <p:spPr>
+          <a:xfrm>
+            <a:off x="9205722" y="1691640"/>
+            <a:ext cx="2370582" cy="274320"/>
+          </a:xfrm>
+          <a:prstGeom prst="rect">
+            <a:avLst/>
+          </a:prstGeom>
+          <a:noFill/>
+          <a:ln/>
+        </p:spPr>
+        <p:txBody>
+          <a:bodyPr wrap="square" lIns="0" tIns="0" rIns="0" bIns="0" rtlCol="0" anchor="ctr"/>
+          <a:lstStyle/>
+          <a:p>
+            <a:pPr algn="l" indent="0" marL="0">
+              <a:buNone/>
+            </a:pPr>
+            <a:r>
+              <a:rPr lang="en-US" sz="1300" b="1" dirty="0">
+                <a:solidFill>
+                  <a:srgbClr val="1A1A1A"/>
+                </a:solidFill>
+                <a:latin typeface="Calibri" pitchFamily="34" charset="0"/>
+                <a:ea typeface="Calibri" pitchFamily="34" charset="-122"/>
+                <a:cs typeface="Calibri" pitchFamily="34" charset="-120"/>
+              </a:rPr>
+              <a:t>4 — render</a:t>
+            </a:r>
+            <a:endParaRPr lang="en-US" sz="1300" dirty="0"/>
+          </a:p>
+        </p:txBody>
+      </p:sp>
+      <p:sp>
+        <p:nvSpPr>
+          <p:cNvPr id="15" name="Text 13"/>
+          <p:cNvSpPr/>
+          <p:nvPr/>
+        </p:nvSpPr>
+        <p:spPr>
+          <a:xfrm>
+            <a:off x="9205722" y="1984248"/>
+            <a:ext cx="2370582" cy="667512"/>
+          </a:xfrm>
+          <a:prstGeom prst="rect">
+            <a:avLst/>
+          </a:prstGeom>
+          <a:noFill/>
+          <a:ln/>
+        </p:spPr>
+        <p:txBody>
+          <a:bodyPr wrap="square" lIns="0" tIns="0" rIns="0" bIns="0" rtlCol="0" anchor="t"/>
+          <a:lstStyle/>
+          <a:p>
+            <a:pPr indent="0" marL="0">
+              <a:lnSpc>
+                <a:spcPct val="108000"/>
+              </a:lnSpc>
+              <a:buNone/>
+            </a:pPr>
+            <a:r>
+              <a:rPr lang="en-US" sz="1050" dirty="0">
+                <a:solidFill>
+                  <a:srgbClr val="444C52"/>
+                </a:solidFill>
+                <a:latin typeface="Calibri" pitchFamily="34" charset="0"/>
+                <a:ea typeface="Calibri" pitchFamily="34" charset="-122"/>
+                <a:cs typeface="Calibri" pitchFamily="34" charset="-120"/>
+              </a:rPr>
+              <a:t>mec_cast/result from the edge</a:t>
+            </a:r>
+            <a:endParaRPr lang="en-US" sz="1050" dirty="0"/>
+          </a:p>
+          <a:p>
+            <a:pPr indent="0" marL="0">
+              <a:lnSpc>
+                <a:spcPct val="108000"/>
+              </a:lnSpc>
+              <a:buNone/>
+            </a:pPr>
+            <a:r>
+              <a:rPr lang="en-US" sz="1050" dirty="0">
+                <a:solidFill>
+                  <a:srgbClr val="444C52"/>
+                </a:solidFill>
+                <a:latin typeface="Calibri" pitchFamily="34" charset="0"/>
+                <a:ea typeface="Calibri" pitchFamily="34" charset="-122"/>
+                <a:cs typeface="Calibri" pitchFamily="34" charset="-120"/>
+              </a:rPr>
+              <a:t>process_done_ns stamped</a:t>
+            </a:r>
+            <a:endParaRPr lang="en-US" sz="1050" dirty="0"/>
+          </a:p>
+        </p:txBody>
+      </p:sp>
+      <p:sp>
+        <p:nvSpPr>
+          <p:cNvPr id="16" name="Shape 14"/>
+          <p:cNvSpPr/>
+          <p:nvPr/>
+        </p:nvSpPr>
+        <p:spPr>
+          <a:xfrm>
+            <a:off x="3120390" y="2171700"/>
+            <a:ext cx="219456" cy="0"/>
+          </a:xfrm>
+          <a:prstGeom prst="line">
+            <a:avLst/>
+          </a:prstGeom>
+          <a:noFill/>
+          <a:ln w="15875">
+            <a:solidFill>
+              <a:srgbClr val="444C52"/>
+            </a:solidFill>
+            <a:prstDash val="solid"/>
+            <a:tailEnd type="triangle"/>
+          </a:ln>
+        </p:spPr>
+      </p:sp>
+      <p:sp>
+        <p:nvSpPr>
+          <p:cNvPr id="17" name="Shape 15"/>
+          <p:cNvSpPr/>
+          <p:nvPr/>
+        </p:nvSpPr>
+        <p:spPr>
+          <a:xfrm>
+            <a:off x="5984748" y="2171700"/>
+            <a:ext cx="219456" cy="0"/>
+          </a:xfrm>
+          <a:prstGeom prst="line">
+            <a:avLst/>
+          </a:prstGeom>
+          <a:noFill/>
+          <a:ln w="15875">
+            <a:solidFill>
+              <a:srgbClr val="444C52"/>
+            </a:solidFill>
+            <a:prstDash val="solid"/>
+            <a:tailEnd type="triangle"/>
+          </a:ln>
+        </p:spPr>
+      </p:sp>
+      <p:sp>
+        <p:nvSpPr>
+          <p:cNvPr id="18" name="Shape 16"/>
+          <p:cNvSpPr/>
+          <p:nvPr/>
+        </p:nvSpPr>
+        <p:spPr>
+          <a:xfrm>
+            <a:off x="8849106" y="2171700"/>
+            <a:ext cx="219456" cy="0"/>
+          </a:xfrm>
+          <a:prstGeom prst="line">
+            <a:avLst/>
+          </a:prstGeom>
+          <a:noFill/>
+          <a:ln w="15875">
+            <a:solidFill>
+              <a:srgbClr val="444C52"/>
+            </a:solidFill>
+            <a:prstDash val="solid"/>
+            <a:tailEnd type="triangle"/>
+          </a:ln>
+        </p:spPr>
+      </p:sp>
+      <p:sp>
+        <p:nvSpPr>
+          <p:cNvPr id="19" name="Shape 17"/>
+          <p:cNvSpPr/>
+          <p:nvPr/>
+        </p:nvSpPr>
+        <p:spPr>
+          <a:xfrm>
+            <a:off x="502920" y="2880360"/>
+            <a:ext cx="5394960" cy="1783080"/>
+          </a:xfrm>
+          <a:prstGeom prst="rect">
+            <a:avLst/>
+          </a:prstGeom>
+          <a:solidFill>
+            <a:srgbClr val="F1F2F3"/>
+          </a:solidFill>
+          <a:ln w="12700">
+            <a:solidFill>
+              <a:srgbClr val="B9BDC0"/>
+            </a:solidFill>
+            <a:prstDash val="solid"/>
+          </a:ln>
+        </p:spPr>
+      </p:sp>
+      <p:sp>
+        <p:nvSpPr>
+          <p:cNvPr id="20" name="Text 18"/>
           <p:cNvSpPr/>
           <p:nvPr/>
         </p:nvSpPr>
@@ -7590,7 +7740,7 @@
       </p:sp>
       <p:sp>
         <p:nvSpPr>
-          <p:cNvPr id="17" name="Text 15"/>
+          <p:cNvPr id="21" name="Text 19"/>
           <p:cNvSpPr/>
           <p:nvPr/>
         </p:nvSpPr>
@@ -7624,7 +7774,7 @@
                 <a:ea typeface="Calibri" pitchFamily="34" charset="-122"/>
                 <a:cs typeface="Calibri" pitchFamily="34" charset="-120"/>
               </a:rPr>
-              <a:t>seed         42               reproducible contents</a:t>
+              <a:t>seed         42            reproducible contents</a:t>
             </a:r>
             <a:endParaRPr lang="en-US" sz="1100" dirty="0"/>
           </a:p>
@@ -7644,7 +7794,7 @@
                 <a:ea typeface="Calibri" pitchFamily="34" charset="-122"/>
                 <a:cs typeface="Calibri" pitchFamily="34" charset="-120"/>
               </a:rPr>
-              <a:t>num_points   30000            payload size — the main sweep</a:t>
+              <a:t>num_points   30000         payload size — the main sweep</a:t>
             </a:r>
             <a:endParaRPr lang="en-US" sz="1100" dirty="0"/>
           </a:p>
@@ -7664,7 +7814,7 @@
                 <a:ea typeface="Calibri" pitchFamily="34" charset="-122"/>
                 <a:cs typeface="Calibri" pitchFamily="34" charset="-120"/>
               </a:rPr>
-              <a:t>rate_hz      10.0             publish rate</a:t>
+              <a:t>rate_hz      10.0          publish rate</a:t>
             </a:r>
             <a:endParaRPr lang="en-US" sz="1100" dirty="0"/>
           </a:p>
@@ -7684,7 +7834,7 @@
                 <a:ea typeface="Calibri" pitchFamily="34" charset="-122"/>
                 <a:cs typeface="Calibri" pitchFamily="34" charset="-120"/>
               </a:rPr>
-              <a:t>pattern      uniform_cube     or rotating_plane</a:t>
+              <a:t>pattern      lidar_scan    also uniform_cube, sphere,</a:t>
             </a:r>
             <a:endParaRPr lang="en-US" sz="1100" dirty="0"/>
           </a:p>
@@ -7695,6 +7845,17 @@
               </a:lnSpc>
               <a:buNone/>
             </a:pPr>
+            <a:r>
+              <a:rPr lang="en-US" sz="1100" dirty="0">
+                <a:solidFill>
+                  <a:srgbClr val="444C52"/>
+                </a:solidFill>
+                <a:latin typeface="Calibri" pitchFamily="34" charset="0"/>
+                <a:ea typeface="Calibri" pitchFamily="34" charset="-122"/>
+                <a:cs typeface="Calibri" pitchFamily="34" charset="-120"/>
+              </a:rPr>
+              <a:t>                           rotating_plane — 1.2x to 6.6x</a:t>
+            </a:r>
             <a:endParaRPr lang="en-US" sz="1100" dirty="0"/>
           </a:p>
           <a:p>
@@ -7713,15 +7874,35 @@
                 <a:ea typeface="Calibri" pitchFamily="34" charset="-122"/>
                 <a:cs typeface="Calibri" pitchFamily="34" charset="-120"/>
               </a:rPr>
-              <a:t>Fixing the seed across a size sweep means only size varies.</a:t>
+              <a:t>                           voxel compression, which sets</a:t>
             </a:r>
             <a:endParaRPr lang="en-US" sz="1100" dirty="0"/>
           </a:p>
-        </p:txBody>
-      </p:sp>
-      <p:sp>
-        <p:nvSpPr>
-          <p:cNvPr id="18" name="Text 16"/>
+          <a:p>
+            <a:pPr indent="0" marL="0">
+              <a:lnSpc>
+                <a:spcPct val="108000"/>
+              </a:lnSpc>
+              <a:buNone/>
+            </a:pPr>
+            <a:r>
+              <a:rPr lang="en-US" sz="1100" dirty="0">
+                <a:solidFill>
+                  <a:srgbClr val="444C52"/>
+                </a:solidFill>
+                <a:latin typeface="Calibri" pitchFamily="34" charset="0"/>
+                <a:ea typeface="Calibri" pitchFamily="34" charset="-122"/>
+                <a:cs typeface="Calibri" pitchFamily="34" charset="-120"/>
+              </a:rPr>
+              <a:t>                           the return payload too</a:t>
+            </a:r>
+            <a:endParaRPr lang="en-US" sz="1100" dirty="0"/>
+          </a:p>
+        </p:txBody>
+      </p:sp>
+      <p:sp>
+        <p:nvSpPr>
+          <p:cNvPr id="22" name="Text 20"/>
           <p:cNvSpPr/>
           <p:nvPr/>
         </p:nvSpPr>
@@ -7777,7 +7958,7 @@
                 <a:ea typeface="Calibri" pitchFamily="34" charset="-122"/>
                 <a:cs typeface="Calibri" pitchFamily="34" charset="-120"/>
               </a:rPr>
-              <a:t>The same synthetic source stands in for a real LiDAR, so the pipeline is testable with no hardware and reproducible in CI.</a:t>
+              <a:t>The renderer is optional and off by default, so the one-way path stays byte-for-byte comparable with campaigns recorded before it existed.</a:t>
             </a:r>
             <a:endParaRPr lang="en-US" sz="1150" dirty="0"/>
           </a:p>
@@ -7785,7 +7966,7 @@
       </p:sp>
       <p:sp>
         <p:nvSpPr>
-          <p:cNvPr id="19" name="Text 17"/>
+          <p:cNvPr id="23" name="Text 21"/>
           <p:cNvSpPr/>
           <p:nvPr/>
         </p:nvSpPr>
@@ -7819,7 +8000,7 @@
                 <a:ea typeface="Calibri" pitchFamily="34" charset="-122"/>
                 <a:cs typeface="Calibri" pitchFamily="34" charset="-120"/>
               </a:rPr>
-              <a:t>Why synthetic first: an Ouster OS1-64 at 10 Hz is roughly 2 MB per frame, about 160 Mbps raw — well beyond a lab 5G uplink. Establishing the latency floor with a controllable payload comes before adding compression, so the cost of compression can be measured rather than assumed.</a:t>
+              <a:t>Both stamps that bound the round trip are taken on this host: capture_ns by the client, process_done_ns by the renderer, off one CLOCK_REALTIME. That makes the renderer's e2e_ns the only end-to-end latency figure in the platform that owes nothing to PTP discipline, and an independent check on the clock offset the one-way metrics depend on.</a:t>
             </a:r>
             <a:endParaRPr lang="en-US" sz="1150" dirty="0"/>
           </a:p>
@@ -8397,6 +8578,26 @@
             </a:r>
             <a:endParaRPr lang="en-US" sz="1050" dirty="0"/>
           </a:p>
+          <a:p>
+            <a:pPr indent="0" marL="0">
+              <a:lnSpc>
+                <a:spcPct val="108000"/>
+              </a:lnSpc>
+              <a:buNone/>
+            </a:pPr>
+            <a:r>
+              <a:rPr lang="en-US" sz="1050" dirty="0">
+                <a:solidFill>
+                  <a:srgbClr val="444C52"/>
+                </a:solidFill>
+                <a:latin typeface="Calibri" pitchFamily="34" charset="0"/>
+                <a:ea typeface="Calibri" pitchFamily="34" charset="-122"/>
+                <a:cs typeface="Calibri" pitchFamily="34" charset="-120"/>
+              </a:rPr>
+              <a:t>then optionally reply</a:t>
+            </a:r>
+            <a:endParaRPr lang="en-US" sz="1050" dirty="0"/>
+          </a:p>
         </p:txBody>
       </p:sp>
       <p:sp>
@@ -8746,6 +8947,27 @@
                 <a:cs typeface="Calibri" pitchFamily="34" charset="-120"/>
               </a:rPr>
               <a:t>A separate uploader thread posts snapshots, so a stalled logging service cannot stall CSV writing.</a:t>
+            </a:r>
+            <a:endParaRPr lang="en-US" sz="1150" dirty="0"/>
+          </a:p>
+          <a:p>
+            <a:pPr marL="342900" indent="-342900">
+              <a:spcAft>
+                <a:spcPts val="500"/>
+              </a:spcAft>
+              <a:buSzPct val="100000"/>
+              <a:buChar char="•"/>
+            </a:pPr>
+            <a:r>
+              <a:rPr lang="en-US" sz="1150" dirty="0">
+                <a:solidFill>
+                  <a:srgbClr val="444C52"/>
+                </a:solidFill>
+                <a:latin typeface="Calibri" pitchFamily="34" charset="0"/>
+                <a:ea typeface="Calibri" pitchFamily="34" charset="-122"/>
+                <a:cs typeface="Calibri" pitchFamily="34" charset="-120"/>
+              </a:rPr>
+              <a:t>With publish_result on, the voxel cloud already computed goes back to the UE on mec_cast/result — after record(), so the edge's own sample is never delayed for the renderer's benefit.</a:t>
             </a:r>
             <a:endParaRPr lang="en-US" sz="1150" dirty="0"/>
           </a:p>

--- a/docs/slides/mec-cast-architecture.pptx
+++ b/docs/slides/mec-cast-architecture.pptx
@@ -7794,7 +7794,7 @@
                 <a:ea typeface="Calibri" pitchFamily="34" charset="-122"/>
                 <a:cs typeface="Calibri" pitchFamily="34" charset="-120"/>
               </a:rPr>
-              <a:t>num_points   30000         payload size — the main sweep</a:t>
+              <a:t>num_points   5000          payload size — the main sweep</a:t>
             </a:r>
             <a:endParaRPr lang="en-US" sz="1100" dirty="0"/>
           </a:p>
@@ -7834,7 +7834,7 @@
                 <a:ea typeface="Calibri" pitchFamily="34" charset="-122"/>
                 <a:cs typeface="Calibri" pitchFamily="34" charset="-120"/>
               </a:rPr>
-              <a:t>pattern      lidar_scan    also uniform_cube, sphere,</a:t>
+              <a:t>pattern      lidar_scan    ten shapes: cube, sphere,</a:t>
             </a:r>
             <a:endParaRPr lang="en-US" sz="1100" dirty="0"/>
           </a:p>
@@ -7854,7 +7854,7 @@
                 <a:ea typeface="Calibri" pitchFamily="34" charset="-122"/>
                 <a:cs typeface="Calibri" pitchFamily="34" charset="-120"/>
               </a:rPr>
-              <a:t>                           rotating_plane — 1.2x to 6.6x</a:t>
+              <a:t>                           torus, helix, wireframe, swarm…</a:t>
             </a:r>
             <a:endParaRPr lang="en-US" sz="1100" dirty="0"/>
           </a:p>
@@ -7874,7 +7874,7 @@
                 <a:ea typeface="Calibri" pitchFamily="34" charset="-122"/>
                 <a:cs typeface="Calibri" pitchFamily="34" charset="-120"/>
               </a:rPr>
-              <a:t>                           voxel compression, which sets</a:t>
+              <a:t>                           1.4x to 23.5x voxel compression,</a:t>
             </a:r>
             <a:endParaRPr lang="en-US" sz="1100" dirty="0"/>
           </a:p>
@@ -7894,7 +7894,7 @@
                 <a:ea typeface="Calibri" pitchFamily="34" charset="-122"/>
                 <a:cs typeface="Calibri" pitchFamily="34" charset="-120"/>
               </a:rPr>
-              <a:t>                           the return payload too</a:t>
+              <a:t>                           which sets the return payload too</a:t>
             </a:r>
             <a:endParaRPr lang="en-US" sz="1100" dirty="0"/>
           </a:p>
